--- a/slides/chapter_4.pptx
+++ b/slides/chapter_4.pptx
@@ -7,10 +7,10 @@
   <p:sldIdLst>
     <p:sldId id="256" r:id="rId2"/>
     <p:sldId id="257" r:id="rId3"/>
-    <p:sldId id="258" r:id="rId4"/>
-    <p:sldId id="272" r:id="rId5"/>
+    <p:sldId id="273" r:id="rId4"/>
+    <p:sldId id="258" r:id="rId5"/>
     <p:sldId id="262" r:id="rId6"/>
-    <p:sldId id="273" r:id="rId7"/>
+    <p:sldId id="272" r:id="rId7"/>
     <p:sldId id="274" r:id="rId8"/>
     <p:sldId id="275" r:id="rId9"/>
     <p:sldId id="259" r:id="rId10"/>
@@ -131,10 +131,10 @@
           <p14:sldIdLst>
             <p14:sldId id="256"/>
             <p14:sldId id="257"/>
+            <p14:sldId id="273"/>
             <p14:sldId id="258"/>
+            <p14:sldId id="262"/>
             <p14:sldId id="272"/>
-            <p14:sldId id="262"/>
-            <p14:sldId id="273"/>
             <p14:sldId id="274"/>
             <p14:sldId id="275"/>
           </p14:sldIdLst>
@@ -316,7 +316,7 @@
           <a:p>
             <a:fld id="{F238F5BA-0AAF-5142-B69C-F1241056CF61}" type="datetimeFigureOut">
               <a:rPr lang="en-US" smtClean="0"/>
-              <a:t>8/26/25</a:t>
+              <a:t>9/3/25</a:t>
             </a:fld>
             <a:endParaRPr lang="en-US"/>
           </a:p>
@@ -527,7 +527,7 @@
           <a:p>
             <a:fld id="{F238F5BA-0AAF-5142-B69C-F1241056CF61}" type="datetimeFigureOut">
               <a:rPr lang="en-US" smtClean="0"/>
-              <a:t>8/26/25</a:t>
+              <a:t>9/3/25</a:t>
             </a:fld>
             <a:endParaRPr lang="en-US"/>
           </a:p>
@@ -742,7 +742,7 @@
           <a:p>
             <a:fld id="{F238F5BA-0AAF-5142-B69C-F1241056CF61}" type="datetimeFigureOut">
               <a:rPr lang="en-US" smtClean="0"/>
-              <a:t>8/26/25</a:t>
+              <a:t>9/3/25</a:t>
             </a:fld>
             <a:endParaRPr lang="en-US"/>
           </a:p>
@@ -943,7 +943,7 @@
           <a:p>
             <a:fld id="{F238F5BA-0AAF-5142-B69C-F1241056CF61}" type="datetimeFigureOut">
               <a:rPr lang="en-US" smtClean="0"/>
-              <a:t>8/26/25</a:t>
+              <a:t>9/3/25</a:t>
             </a:fld>
             <a:endParaRPr lang="en-US"/>
           </a:p>
@@ -1222,7 +1222,7 @@
           <a:p>
             <a:fld id="{F238F5BA-0AAF-5142-B69C-F1241056CF61}" type="datetimeFigureOut">
               <a:rPr lang="en-US" smtClean="0"/>
-              <a:t>8/26/25</a:t>
+              <a:t>9/3/25</a:t>
             </a:fld>
             <a:endParaRPr lang="en-US"/>
           </a:p>
@@ -1490,7 +1490,7 @@
           <a:p>
             <a:fld id="{F238F5BA-0AAF-5142-B69C-F1241056CF61}" type="datetimeFigureOut">
               <a:rPr lang="en-US" smtClean="0"/>
-              <a:t>8/26/25</a:t>
+              <a:t>9/3/25</a:t>
             </a:fld>
             <a:endParaRPr lang="en-US"/>
           </a:p>
@@ -1906,7 +1906,7 @@
           <a:p>
             <a:fld id="{F238F5BA-0AAF-5142-B69C-F1241056CF61}" type="datetimeFigureOut">
               <a:rPr lang="en-US" smtClean="0"/>
-              <a:t>8/26/25</a:t>
+              <a:t>9/3/25</a:t>
             </a:fld>
             <a:endParaRPr lang="en-US"/>
           </a:p>
@@ -2055,7 +2055,7 @@
           <a:p>
             <a:fld id="{F238F5BA-0AAF-5142-B69C-F1241056CF61}" type="datetimeFigureOut">
               <a:rPr lang="en-US" smtClean="0"/>
-              <a:t>8/26/25</a:t>
+              <a:t>9/3/25</a:t>
             </a:fld>
             <a:endParaRPr lang="en-US"/>
           </a:p>
@@ -2181,7 +2181,7 @@
           <a:p>
             <a:fld id="{F238F5BA-0AAF-5142-B69C-F1241056CF61}" type="datetimeFigureOut">
               <a:rPr lang="en-US" smtClean="0"/>
-              <a:t>8/26/25</a:t>
+              <a:t>9/3/25</a:t>
             </a:fld>
             <a:endParaRPr lang="en-US"/>
           </a:p>
@@ -2432,7 +2432,7 @@
           <a:p>
             <a:fld id="{F238F5BA-0AAF-5142-B69C-F1241056CF61}" type="datetimeFigureOut">
               <a:rPr lang="en-US" smtClean="0"/>
-              <a:t>8/26/25</a:t>
+              <a:t>9/3/25</a:t>
             </a:fld>
             <a:endParaRPr lang="en-US"/>
           </a:p>
@@ -2877,7 +2877,7 @@
           <a:p>
             <a:fld id="{F238F5BA-0AAF-5142-B69C-F1241056CF61}" type="datetimeFigureOut">
               <a:rPr lang="en-US" smtClean="0"/>
-              <a:t>8/26/25</a:t>
+              <a:t>9/3/25</a:t>
             </a:fld>
             <a:endParaRPr lang="en-US"/>
           </a:p>
@@ -3204,7 +3204,7 @@
           <a:p>
             <a:fld id="{F238F5BA-0AAF-5142-B69C-F1241056CF61}" type="datetimeFigureOut">
               <a:rPr lang="en-US" smtClean="0"/>
-              <a:t>8/26/25</a:t>
+              <a:t>9/3/25</a:t>
             </a:fld>
             <a:endParaRPr lang="en-US"/>
           </a:p>
@@ -5666,7 +5666,12 @@
             <p:ph idx="1"/>
           </p:nvPr>
         </p:nvSpPr>
-        <p:spPr/>
+        <p:spPr>
+          <a:xfrm>
+            <a:off x="1451579" y="1944413"/>
+            <a:ext cx="9603275" cy="4109067"/>
+          </a:xfrm>
+        </p:spPr>
         <p:txBody>
           <a:bodyPr/>
           <a:lstStyle/>
@@ -5675,6 +5680,82 @@
               <a:rPr lang="en-US" dirty="0"/>
               <a:t>Color is a primary feature in visualizations. </a:t>
             </a:r>
+          </a:p>
+          <a:p>
+            <a:pPr lvl="1"/>
+            <a:r>
+              <a:rPr lang="en-US" dirty="0"/>
+              <a:t>Most visualizations can have color added pretty easily. </a:t>
+            </a:r>
+          </a:p>
+          <a:p>
+            <a:r>
+              <a:rPr lang="en-US" dirty="0"/>
+              <a:t>We can encode, or represent data from variables via color:</a:t>
+            </a:r>
+          </a:p>
+          <a:p>
+            <a:pPr lvl="1"/>
+            <a:r>
+              <a:rPr lang="en-US" dirty="0"/>
+              <a:t>Numeric variables can be represented with a gradient. </a:t>
+            </a:r>
+          </a:p>
+          <a:p>
+            <a:pPr lvl="1"/>
+            <a:r>
+              <a:rPr lang="en-US" dirty="0"/>
+              <a:t>Categorical variables can be represented with different colors. </a:t>
+            </a:r>
+          </a:p>
+          <a:p>
+            <a:r>
+              <a:rPr lang="en-US" dirty="0"/>
+              <a:t>Color is one of the most prevalent </a:t>
+            </a:r>
+            <a:r>
+              <a:rPr lang="en-US" dirty="0" err="1"/>
+              <a:t>preattentive</a:t>
+            </a:r>
+            <a:r>
+              <a:rPr lang="en-US" dirty="0"/>
+              <a:t> attributes.</a:t>
+            </a:r>
+          </a:p>
+          <a:p>
+            <a:pPr lvl="1"/>
+            <a:r>
+              <a:rPr lang="en-US" dirty="0"/>
+              <a:t>We have preexisting understanding of many color things – red/green, dark/light, </a:t>
+            </a:r>
+            <a:r>
+              <a:rPr lang="en-US" dirty="0" err="1"/>
+              <a:t>etc</a:t>
+            </a:r>
+            <a:r>
+              <a:rPr lang="en-US" dirty="0"/>
+              <a:t>…</a:t>
+            </a:r>
+          </a:p>
+          <a:p>
+            <a:pPr lvl="1"/>
+            <a:r>
+              <a:rPr lang="en-US" dirty="0"/>
+              <a:t>We notice color quickly and our brain categorizes/orders based </a:t>
+            </a:r>
+            <a:r>
+              <a:rPr lang="en-US"/>
+              <a:t>on it.</a:t>
+            </a:r>
+            <a:r>
+              <a:rPr lang="en-US" dirty="0"/>
+              <a:t> </a:t>
+            </a:r>
+            <a:r>
+              <a:rPr lang="en-US"/>
+              <a:t> </a:t>
+            </a:r>
+            <a:endParaRPr lang="en-US" dirty="0"/>
           </a:p>
         </p:txBody>
       </p:sp>
@@ -5913,6 +5994,133 @@
           <p:cNvPr id="2" name="Title 1">
             <a:extLst>
               <a:ext uri="{FF2B5EF4-FFF2-40B4-BE49-F238E27FC236}">
+                <a16:creationId xmlns:a16="http://schemas.microsoft.com/office/drawing/2014/main" id="{8042FC15-93FE-CD95-AF9B-B5CD9914DE51}"/>
+              </a:ext>
+            </a:extLst>
+          </p:cNvPr>
+          <p:cNvSpPr>
+            <a:spLocks noGrp="1"/>
+          </p:cNvSpPr>
+          <p:nvPr>
+            <p:ph type="title"/>
+          </p:nvPr>
+        </p:nvSpPr>
+        <p:spPr/>
+        <p:txBody>
+          <a:bodyPr/>
+          <a:lstStyle/>
+          <a:p>
+            <a:endParaRPr lang="en-US"/>
+          </a:p>
+        </p:txBody>
+      </p:sp>
+      <p:sp>
+        <p:nvSpPr>
+          <p:cNvPr id="3" name="Content Placeholder 2">
+            <a:extLst>
+              <a:ext uri="{FF2B5EF4-FFF2-40B4-BE49-F238E27FC236}">
+                <a16:creationId xmlns:a16="http://schemas.microsoft.com/office/drawing/2014/main" id="{45E9319F-C3E6-61E2-B472-59354CEED2AB}"/>
+              </a:ext>
+            </a:extLst>
+          </p:cNvPr>
+          <p:cNvSpPr>
+            <a:spLocks noGrp="1"/>
+          </p:cNvSpPr>
+          <p:nvPr>
+            <p:ph idx="1"/>
+          </p:nvPr>
+        </p:nvSpPr>
+        <p:spPr/>
+        <p:txBody>
+          <a:bodyPr/>
+          <a:lstStyle/>
+          <a:p>
+            <a:endParaRPr lang="en-US"/>
+          </a:p>
+        </p:txBody>
+      </p:sp>
+      <p:pic>
+        <p:nvPicPr>
+          <p:cNvPr id="2050" name="Picture 2" descr="Launched: More accessible and modern color palettes - Product Releases -  Holistics Community">
+            <a:extLst>
+              <a:ext uri="{FF2B5EF4-FFF2-40B4-BE49-F238E27FC236}">
+                <a16:creationId xmlns:a16="http://schemas.microsoft.com/office/drawing/2014/main" id="{EDFD0B7A-E123-9DF2-1449-9E921F350611}"/>
+              </a:ext>
+            </a:extLst>
+          </p:cNvPr>
+          <p:cNvPicPr>
+            <a:picLocks noChangeAspect="1" noChangeArrowheads="1"/>
+          </p:cNvPicPr>
+          <p:nvPr/>
+        </p:nvPicPr>
+        <p:blipFill>
+          <a:blip r:embed="rId2">
+            <a:extLst>
+              <a:ext uri="{28A0092B-C50C-407E-A947-70E740481C1C}">
+                <a14:useLocalDpi xmlns:a14="http://schemas.microsoft.com/office/drawing/2010/main" val="0"/>
+              </a:ext>
+            </a:extLst>
+          </a:blip>
+          <a:srcRect/>
+          <a:stretch>
+            <a:fillRect/>
+          </a:stretch>
+        </p:blipFill>
+        <p:spPr bwMode="auto">
+          <a:xfrm>
+            <a:off x="0" y="322263"/>
+            <a:ext cx="12192000" cy="6211887"/>
+          </a:xfrm>
+          <a:prstGeom prst="rect">
+            <a:avLst/>
+          </a:prstGeom>
+          <a:noFill/>
+          <a:extLst>
+            <a:ext uri="{909E8E84-426E-40DD-AFC4-6F175D3DCCD1}">
+              <a14:hiddenFill xmlns:a14="http://schemas.microsoft.com/office/drawing/2010/main">
+                <a:solidFill>
+                  <a:srgbClr val="FFFFFF"/>
+                </a:solidFill>
+              </a14:hiddenFill>
+            </a:ext>
+          </a:extLst>
+        </p:spPr>
+      </p:pic>
+    </p:spTree>
+    <p:extLst>
+      <p:ext uri="{BB962C8B-B14F-4D97-AF65-F5344CB8AC3E}">
+        <p14:creationId xmlns:p14="http://schemas.microsoft.com/office/powerpoint/2010/main" val="2731412503"/>
+      </p:ext>
+    </p:extLst>
+  </p:cSld>
+  <p:clrMapOvr>
+    <a:masterClrMapping/>
+  </p:clrMapOvr>
+</p:sld>
+</file>
+
+<file path=ppt/slides/slide4.xml><?xml version="1.0" encoding="utf-8"?>
+<p:sld xmlns:a="http://schemas.openxmlformats.org/drawingml/2006/main" xmlns:r="http://schemas.openxmlformats.org/officeDocument/2006/relationships" xmlns:p="http://schemas.openxmlformats.org/presentationml/2006/main">
+  <p:cSld>
+    <p:spTree>
+      <p:nvGrpSpPr>
+        <p:cNvPr id="1" name=""/>
+        <p:cNvGrpSpPr/>
+        <p:nvPr/>
+      </p:nvGrpSpPr>
+      <p:grpSpPr>
+        <a:xfrm>
+          <a:off x="0" y="0"/>
+          <a:ext cx="0" cy="0"/>
+          <a:chOff x="0" y="0"/>
+          <a:chExt cx="0" cy="0"/>
+        </a:xfrm>
+      </p:grpSpPr>
+      <p:sp>
+        <p:nvSpPr>
+          <p:cNvPr id="2" name="Title 1">
+            <a:extLst>
+              <a:ext uri="{FF2B5EF4-FFF2-40B4-BE49-F238E27FC236}">
                 <a16:creationId xmlns:a16="http://schemas.microsoft.com/office/drawing/2014/main" id="{040A2045-7085-4E76-FFFE-B687F1D889F9}"/>
               </a:ext>
             </a:extLst>
@@ -5971,7 +6179,144 @@
 </p:sld>
 </file>
 
-<file path=ppt/slides/slide4.xml><?xml version="1.0" encoding="utf-8"?>
+<file path=ppt/slides/slide5.xml><?xml version="1.0" encoding="utf-8"?>
+<p:sld xmlns:a="http://schemas.openxmlformats.org/drawingml/2006/main" xmlns:r="http://schemas.openxmlformats.org/officeDocument/2006/relationships" xmlns:p="http://schemas.openxmlformats.org/presentationml/2006/main">
+  <p:cSld>
+    <p:spTree>
+      <p:nvGrpSpPr>
+        <p:cNvPr id="1" name=""/>
+        <p:cNvGrpSpPr/>
+        <p:nvPr/>
+      </p:nvGrpSpPr>
+      <p:grpSpPr>
+        <a:xfrm>
+          <a:off x="0" y="0"/>
+          <a:ext cx="0" cy="0"/>
+          <a:chOff x="0" y="0"/>
+          <a:chExt cx="0" cy="0"/>
+        </a:xfrm>
+      </p:grpSpPr>
+      <p:sp>
+        <p:nvSpPr>
+          <p:cNvPr id="2" name="Title 1">
+            <a:extLst>
+              <a:ext uri="{FF2B5EF4-FFF2-40B4-BE49-F238E27FC236}">
+                <a16:creationId xmlns:a16="http://schemas.microsoft.com/office/drawing/2014/main" id="{6059DF24-E219-D222-DD32-DE860AD7F640}"/>
+              </a:ext>
+            </a:extLst>
+          </p:cNvPr>
+          <p:cNvSpPr>
+            <a:spLocks noGrp="1"/>
+          </p:cNvSpPr>
+          <p:nvPr>
+            <p:ph type="title"/>
+          </p:nvPr>
+        </p:nvSpPr>
+        <p:spPr/>
+        <p:txBody>
+          <a:bodyPr/>
+          <a:lstStyle/>
+          <a:p>
+            <a:r>
+              <a:rPr lang="en-US" dirty="0"/>
+              <a:t>Scales and Color Choices</a:t>
+            </a:r>
+          </a:p>
+        </p:txBody>
+      </p:sp>
+      <p:sp>
+        <p:nvSpPr>
+          <p:cNvPr id="3" name="Content Placeholder 2">
+            <a:extLst>
+              <a:ext uri="{FF2B5EF4-FFF2-40B4-BE49-F238E27FC236}">
+                <a16:creationId xmlns:a16="http://schemas.microsoft.com/office/drawing/2014/main" id="{037C55D8-524C-8D2D-EA18-80D67373DC0C}"/>
+              </a:ext>
+            </a:extLst>
+          </p:cNvPr>
+          <p:cNvSpPr>
+            <a:spLocks noGrp="1"/>
+          </p:cNvSpPr>
+          <p:nvPr>
+            <p:ph idx="1"/>
+          </p:nvPr>
+        </p:nvSpPr>
+        <p:spPr>
+          <a:xfrm>
+            <a:off x="1451579" y="2015732"/>
+            <a:ext cx="9603275" cy="3903154"/>
+          </a:xfrm>
+        </p:spPr>
+        <p:txBody>
+          <a:bodyPr/>
+          <a:lstStyle/>
+          <a:p>
+            <a:r>
+              <a:rPr lang="en-US" dirty="0"/>
+              <a:t>Color choice and visual design is a massive area of study. </a:t>
+            </a:r>
+          </a:p>
+          <a:p>
+            <a:r>
+              <a:rPr lang="en-US" dirty="0"/>
+              <a:t>We don’t need to be experts, but we need to be competent. </a:t>
+            </a:r>
+          </a:p>
+          <a:p>
+            <a:r>
+              <a:rPr lang="en-US" dirty="0"/>
+              <a:t>Think – we want to convey some info, does adding color make that clearer. </a:t>
+            </a:r>
+          </a:p>
+          <a:p>
+            <a:pPr lvl="1"/>
+            <a:r>
+              <a:rPr lang="en-US" dirty="0"/>
+              <a:t>Always ask this. </a:t>
+            </a:r>
+          </a:p>
+          <a:p>
+            <a:r>
+              <a:rPr lang="en-US" dirty="0"/>
+              <a:t>Two main things that we use color for:</a:t>
+            </a:r>
+          </a:p>
+          <a:p>
+            <a:pPr lvl="1"/>
+            <a:r>
+              <a:rPr lang="en-US" dirty="0"/>
+              <a:t>Differentiation – showing different categories with different colors. E.g. province map. </a:t>
+            </a:r>
+          </a:p>
+          <a:p>
+            <a:pPr lvl="1"/>
+            <a:r>
+              <a:rPr lang="en-US" dirty="0"/>
+              <a:t>Gradient – showing progress of a numerical value over a range. E.g. crime map. </a:t>
+            </a:r>
+          </a:p>
+          <a:p>
+            <a:pPr lvl="1"/>
+            <a:r>
+              <a:rPr lang="en-US" dirty="0"/>
+              <a:t>Gradients can be both diverging and sequential, roughly – is there a middle? </a:t>
+            </a:r>
+          </a:p>
+        </p:txBody>
+      </p:sp>
+    </p:spTree>
+    <p:extLst>
+      <p:ext uri="{BB962C8B-B14F-4D97-AF65-F5344CB8AC3E}">
+        <p14:creationId xmlns:p14="http://schemas.microsoft.com/office/powerpoint/2010/main" val="73797709"/>
+      </p:ext>
+    </p:extLst>
+  </p:cSld>
+  <p:clrMapOvr>
+    <a:masterClrMapping/>
+  </p:clrMapOvr>
+</p:sld>
+</file>
+
+<file path=ppt/slides/slide6.xml><?xml version="1.0" encoding="utf-8"?>
 <p:sld xmlns:a="http://schemas.openxmlformats.org/drawingml/2006/main" xmlns:r="http://schemas.openxmlformats.org/officeDocument/2006/relationships" xmlns:p="http://schemas.openxmlformats.org/presentationml/2006/main">
   <p:cSld>
     <p:spTree>
@@ -6089,270 +6434,6 @@
     <p:extLst>
       <p:ext uri="{BB962C8B-B14F-4D97-AF65-F5344CB8AC3E}">
         <p14:creationId xmlns:p14="http://schemas.microsoft.com/office/powerpoint/2010/main" val="1946160460"/>
-      </p:ext>
-    </p:extLst>
-  </p:cSld>
-  <p:clrMapOvr>
-    <a:masterClrMapping/>
-  </p:clrMapOvr>
-</p:sld>
-</file>
-
-<file path=ppt/slides/slide5.xml><?xml version="1.0" encoding="utf-8"?>
-<p:sld xmlns:a="http://schemas.openxmlformats.org/drawingml/2006/main" xmlns:r="http://schemas.openxmlformats.org/officeDocument/2006/relationships" xmlns:p="http://schemas.openxmlformats.org/presentationml/2006/main">
-  <p:cSld>
-    <p:spTree>
-      <p:nvGrpSpPr>
-        <p:cNvPr id="1" name=""/>
-        <p:cNvGrpSpPr/>
-        <p:nvPr/>
-      </p:nvGrpSpPr>
-      <p:grpSpPr>
-        <a:xfrm>
-          <a:off x="0" y="0"/>
-          <a:ext cx="0" cy="0"/>
-          <a:chOff x="0" y="0"/>
-          <a:chExt cx="0" cy="0"/>
-        </a:xfrm>
-      </p:grpSpPr>
-      <p:sp>
-        <p:nvSpPr>
-          <p:cNvPr id="2" name="Title 1">
-            <a:extLst>
-              <a:ext uri="{FF2B5EF4-FFF2-40B4-BE49-F238E27FC236}">
-                <a16:creationId xmlns:a16="http://schemas.microsoft.com/office/drawing/2014/main" id="{6059DF24-E219-D222-DD32-DE860AD7F640}"/>
-              </a:ext>
-            </a:extLst>
-          </p:cNvPr>
-          <p:cNvSpPr>
-            <a:spLocks noGrp="1"/>
-          </p:cNvSpPr>
-          <p:nvPr>
-            <p:ph type="title"/>
-          </p:nvPr>
-        </p:nvSpPr>
-        <p:spPr/>
-        <p:txBody>
-          <a:bodyPr/>
-          <a:lstStyle/>
-          <a:p>
-            <a:r>
-              <a:rPr lang="en-US" dirty="0"/>
-              <a:t>Scales and Color Choices</a:t>
-            </a:r>
-          </a:p>
-        </p:txBody>
-      </p:sp>
-      <p:sp>
-        <p:nvSpPr>
-          <p:cNvPr id="3" name="Content Placeholder 2">
-            <a:extLst>
-              <a:ext uri="{FF2B5EF4-FFF2-40B4-BE49-F238E27FC236}">
-                <a16:creationId xmlns:a16="http://schemas.microsoft.com/office/drawing/2014/main" id="{037C55D8-524C-8D2D-EA18-80D67373DC0C}"/>
-              </a:ext>
-            </a:extLst>
-          </p:cNvPr>
-          <p:cNvSpPr>
-            <a:spLocks noGrp="1"/>
-          </p:cNvSpPr>
-          <p:nvPr>
-            <p:ph idx="1"/>
-          </p:nvPr>
-        </p:nvSpPr>
-        <p:spPr>
-          <a:xfrm>
-            <a:off x="1451579" y="2015732"/>
-            <a:ext cx="9603275" cy="3903154"/>
-          </a:xfrm>
-        </p:spPr>
-        <p:txBody>
-          <a:bodyPr/>
-          <a:lstStyle/>
-          <a:p>
-            <a:r>
-              <a:rPr lang="en-US" dirty="0"/>
-              <a:t>Color choice and visual design is a massive area of study. </a:t>
-            </a:r>
-          </a:p>
-          <a:p>
-            <a:r>
-              <a:rPr lang="en-US" dirty="0"/>
-              <a:t>We don’t need to be experts, but we need to be competent. </a:t>
-            </a:r>
-          </a:p>
-          <a:p>
-            <a:r>
-              <a:rPr lang="en-US" dirty="0"/>
-              <a:t>Think – we want to convey some info, does adding color make that clearer. </a:t>
-            </a:r>
-          </a:p>
-          <a:p>
-            <a:pPr lvl="1"/>
-            <a:r>
-              <a:rPr lang="en-US" dirty="0"/>
-              <a:t>Always ask this. </a:t>
-            </a:r>
-          </a:p>
-          <a:p>
-            <a:r>
-              <a:rPr lang="en-US" dirty="0"/>
-              <a:t>Two main things that we use color for:</a:t>
-            </a:r>
-          </a:p>
-          <a:p>
-            <a:pPr lvl="1"/>
-            <a:r>
-              <a:rPr lang="en-US" dirty="0"/>
-              <a:t>Differentiation – showing different categories with different colors. E.g. province map. </a:t>
-            </a:r>
-          </a:p>
-          <a:p>
-            <a:pPr lvl="1"/>
-            <a:r>
-              <a:rPr lang="en-US" dirty="0"/>
-              <a:t>Gradient – showing progress of a numerical value over a range. E.g. crime map. </a:t>
-            </a:r>
-          </a:p>
-          <a:p>
-            <a:pPr lvl="1"/>
-            <a:r>
-              <a:rPr lang="en-US" dirty="0"/>
-              <a:t>Gradients can be both diverging and sequential, roughly – is there a middle? </a:t>
-            </a:r>
-          </a:p>
-        </p:txBody>
-      </p:sp>
-    </p:spTree>
-    <p:extLst>
-      <p:ext uri="{BB962C8B-B14F-4D97-AF65-F5344CB8AC3E}">
-        <p14:creationId xmlns:p14="http://schemas.microsoft.com/office/powerpoint/2010/main" val="73797709"/>
-      </p:ext>
-    </p:extLst>
-  </p:cSld>
-  <p:clrMapOvr>
-    <a:masterClrMapping/>
-  </p:clrMapOvr>
-</p:sld>
-</file>
-
-<file path=ppt/slides/slide6.xml><?xml version="1.0" encoding="utf-8"?>
-<p:sld xmlns:a="http://schemas.openxmlformats.org/drawingml/2006/main" xmlns:r="http://schemas.openxmlformats.org/officeDocument/2006/relationships" xmlns:p="http://schemas.openxmlformats.org/presentationml/2006/main">
-  <p:cSld>
-    <p:spTree>
-      <p:nvGrpSpPr>
-        <p:cNvPr id="1" name=""/>
-        <p:cNvGrpSpPr/>
-        <p:nvPr/>
-      </p:nvGrpSpPr>
-      <p:grpSpPr>
-        <a:xfrm>
-          <a:off x="0" y="0"/>
-          <a:ext cx="0" cy="0"/>
-          <a:chOff x="0" y="0"/>
-          <a:chExt cx="0" cy="0"/>
-        </a:xfrm>
-      </p:grpSpPr>
-      <p:sp>
-        <p:nvSpPr>
-          <p:cNvPr id="2" name="Title 1">
-            <a:extLst>
-              <a:ext uri="{FF2B5EF4-FFF2-40B4-BE49-F238E27FC236}">
-                <a16:creationId xmlns:a16="http://schemas.microsoft.com/office/drawing/2014/main" id="{8042FC15-93FE-CD95-AF9B-B5CD9914DE51}"/>
-              </a:ext>
-            </a:extLst>
-          </p:cNvPr>
-          <p:cNvSpPr>
-            <a:spLocks noGrp="1"/>
-          </p:cNvSpPr>
-          <p:nvPr>
-            <p:ph type="title"/>
-          </p:nvPr>
-        </p:nvSpPr>
-        <p:spPr/>
-        <p:txBody>
-          <a:bodyPr/>
-          <a:lstStyle/>
-          <a:p>
-            <a:endParaRPr lang="en-US"/>
-          </a:p>
-        </p:txBody>
-      </p:sp>
-      <p:sp>
-        <p:nvSpPr>
-          <p:cNvPr id="3" name="Content Placeholder 2">
-            <a:extLst>
-              <a:ext uri="{FF2B5EF4-FFF2-40B4-BE49-F238E27FC236}">
-                <a16:creationId xmlns:a16="http://schemas.microsoft.com/office/drawing/2014/main" id="{45E9319F-C3E6-61E2-B472-59354CEED2AB}"/>
-              </a:ext>
-            </a:extLst>
-          </p:cNvPr>
-          <p:cNvSpPr>
-            <a:spLocks noGrp="1"/>
-          </p:cNvSpPr>
-          <p:nvPr>
-            <p:ph idx="1"/>
-          </p:nvPr>
-        </p:nvSpPr>
-        <p:spPr/>
-        <p:txBody>
-          <a:bodyPr/>
-          <a:lstStyle/>
-          <a:p>
-            <a:endParaRPr lang="en-US"/>
-          </a:p>
-        </p:txBody>
-      </p:sp>
-      <p:pic>
-        <p:nvPicPr>
-          <p:cNvPr id="2050" name="Picture 2" descr="Launched: More accessible and modern color palettes - Product Releases -  Holistics Community">
-            <a:extLst>
-              <a:ext uri="{FF2B5EF4-FFF2-40B4-BE49-F238E27FC236}">
-                <a16:creationId xmlns:a16="http://schemas.microsoft.com/office/drawing/2014/main" id="{EDFD0B7A-E123-9DF2-1449-9E921F350611}"/>
-              </a:ext>
-            </a:extLst>
-          </p:cNvPr>
-          <p:cNvPicPr>
-            <a:picLocks noChangeAspect="1" noChangeArrowheads="1"/>
-          </p:cNvPicPr>
-          <p:nvPr/>
-        </p:nvPicPr>
-        <p:blipFill>
-          <a:blip r:embed="rId2">
-            <a:extLst>
-              <a:ext uri="{28A0092B-C50C-407E-A947-70E740481C1C}">
-                <a14:useLocalDpi xmlns:a14="http://schemas.microsoft.com/office/drawing/2010/main" val="0"/>
-              </a:ext>
-            </a:extLst>
-          </a:blip>
-          <a:srcRect/>
-          <a:stretch>
-            <a:fillRect/>
-          </a:stretch>
-        </p:blipFill>
-        <p:spPr bwMode="auto">
-          <a:xfrm>
-            <a:off x="0" y="322263"/>
-            <a:ext cx="12192000" cy="6211887"/>
-          </a:xfrm>
-          <a:prstGeom prst="rect">
-            <a:avLst/>
-          </a:prstGeom>
-          <a:noFill/>
-          <a:extLst>
-            <a:ext uri="{909E8E84-426E-40DD-AFC4-6F175D3DCCD1}">
-              <a14:hiddenFill xmlns:a14="http://schemas.microsoft.com/office/drawing/2010/main">
-                <a:solidFill>
-                  <a:srgbClr val="FFFFFF"/>
-                </a:solidFill>
-              </a14:hiddenFill>
-            </a:ext>
-          </a:extLst>
-        </p:spPr>
-      </p:pic>
-    </p:spTree>
-    <p:extLst>
-      <p:ext uri="{BB962C8B-B14F-4D97-AF65-F5344CB8AC3E}">
-        <p14:creationId xmlns:p14="http://schemas.microsoft.com/office/powerpoint/2010/main" val="2731412503"/>
       </p:ext>
     </p:extLst>
   </p:cSld>

--- a/slides/chapter_4.pptx
+++ b/slides/chapter_4.pptx
@@ -4404,7 +4404,7 @@
 </file>
 
 <file path=ppt/slides/slide14.xml><?xml version="1.0" encoding="utf-8"?>
-<p:sld xmlns:a="http://schemas.openxmlformats.org/drawingml/2006/main" xmlns:r="http://schemas.openxmlformats.org/officeDocument/2006/relationships" xmlns:p="http://schemas.openxmlformats.org/presentationml/2006/main">
+<p:sld xmlns:a="http://schemas.openxmlformats.org/drawingml/2006/main" xmlns:r="http://schemas.openxmlformats.org/officeDocument/2006/relationships" xmlns:p="http://schemas.openxmlformats.org/presentationml/2006/main" show="0">
   <p:cSld>
     <p:spTree>
       <p:nvGrpSpPr>
@@ -4547,7 +4547,7 @@
 </file>
 
 <file path=ppt/slides/slide15.xml><?xml version="1.0" encoding="utf-8"?>
-<p:sld xmlns:a="http://schemas.openxmlformats.org/drawingml/2006/main" xmlns:r="http://schemas.openxmlformats.org/officeDocument/2006/relationships" xmlns:p="http://schemas.openxmlformats.org/presentationml/2006/main">
+<p:sld xmlns:a="http://schemas.openxmlformats.org/drawingml/2006/main" xmlns:r="http://schemas.openxmlformats.org/officeDocument/2006/relationships" xmlns:p="http://schemas.openxmlformats.org/presentationml/2006/main" show="0">
   <p:cSld>
     <p:spTree>
       <p:nvGrpSpPr>
@@ -5741,21 +5741,8 @@
             <a:pPr lvl="1"/>
             <a:r>
               <a:rPr lang="en-US" dirty="0"/>
-              <a:t>We notice color quickly and our brain categorizes/orders based </a:t>
-            </a:r>
-            <a:r>
-              <a:rPr lang="en-US"/>
-              <a:t>on it.</a:t>
-            </a:r>
-            <a:r>
-              <a:rPr lang="en-US" dirty="0"/>
-              <a:t> </a:t>
-            </a:r>
-            <a:r>
-              <a:rPr lang="en-US"/>
-              <a:t> </a:t>
-            </a:r>
-            <a:endParaRPr lang="en-US" dirty="0"/>
+              <a:t>We notice color quickly and our brain categorizes/orders based on it.  </a:t>
+            </a:r>
           </a:p>
         </p:txBody>
       </p:sp>
@@ -5812,7 +5799,7 @@
           <a:p>
             <a:r>
               <a:rPr lang="en-US" dirty="0"/>
-              <a:t>Color and Adding Density</a:t>
+              <a:t>Color and Concerns Adding Density</a:t>
             </a:r>
           </a:p>
         </p:txBody>
@@ -5950,12 +5937,52 @@
             <p:ph idx="1"/>
           </p:nvPr>
         </p:nvSpPr>
-        <p:spPr/>
-        <p:txBody>
-          <a:bodyPr/>
-          <a:lstStyle/>
-          <a:p>
-            <a:endParaRPr lang="en-US"/>
+        <p:spPr>
+          <a:xfrm>
+            <a:off x="1451579" y="1853754"/>
+            <a:ext cx="9603275" cy="4042549"/>
+          </a:xfrm>
+        </p:spPr>
+        <p:txBody>
+          <a:bodyPr/>
+          <a:lstStyle/>
+          <a:p>
+            <a:r>
+              <a:rPr lang="en-US" dirty="0"/>
+              <a:t>Color is a primary tool in visualization. </a:t>
+            </a:r>
+          </a:p>
+          <a:p>
+            <a:r>
+              <a:rPr lang="en-US" dirty="0"/>
+              <a:t>We can use it in several way to embed information. </a:t>
+            </a:r>
+          </a:p>
+          <a:p>
+            <a:pPr lvl="1"/>
+            <a:r>
+              <a:rPr lang="en-US" dirty="0"/>
+              <a:t>Categorical label, diverging gradient, sequential gradient. </a:t>
+            </a:r>
+          </a:p>
+          <a:p>
+            <a:r>
+              <a:rPr lang="en-US" dirty="0"/>
+              <a:t>Color also has common meaning. </a:t>
+            </a:r>
+          </a:p>
+          <a:p>
+            <a:pPr lvl="1"/>
+            <a:r>
+              <a:rPr lang="en-US" dirty="0"/>
+              <a:t>Red is stop, green is go, blue is water…</a:t>
+            </a:r>
+          </a:p>
+          <a:p>
+            <a:r>
+              <a:rPr lang="en-US" dirty="0"/>
+              <a:t>Color is easy to add to virtually any mark. </a:t>
+            </a:r>
           </a:p>
         </p:txBody>
       </p:sp>

--- a/slides/chapter_4.pptx
+++ b/slides/chapter_4.pptx
@@ -5,10 +5,10 @@
     <p:sldMasterId id="2147483660" r:id="rId1"/>
   </p:sldMasterIdLst>
   <p:sldIdLst>
-    <p:sldId id="256" r:id="rId2"/>
-    <p:sldId id="257" r:id="rId3"/>
-    <p:sldId id="273" r:id="rId4"/>
-    <p:sldId id="258" r:id="rId5"/>
+    <p:sldId id="278" r:id="rId2"/>
+    <p:sldId id="256" r:id="rId3"/>
+    <p:sldId id="257" r:id="rId4"/>
+    <p:sldId id="273" r:id="rId5"/>
     <p:sldId id="262" r:id="rId6"/>
     <p:sldId id="272" r:id="rId7"/>
     <p:sldId id="274" r:id="rId8"/>
@@ -20,12 +20,13 @@
     <p:sldId id="261" r:id="rId14"/>
     <p:sldId id="268" r:id="rId15"/>
     <p:sldId id="269" r:id="rId16"/>
-    <p:sldId id="263" r:id="rId17"/>
-    <p:sldId id="264" r:id="rId18"/>
-    <p:sldId id="276" r:id="rId19"/>
-    <p:sldId id="265" r:id="rId20"/>
-    <p:sldId id="270" r:id="rId21"/>
-    <p:sldId id="271" r:id="rId22"/>
+    <p:sldId id="277" r:id="rId17"/>
+    <p:sldId id="263" r:id="rId18"/>
+    <p:sldId id="264" r:id="rId19"/>
+    <p:sldId id="276" r:id="rId20"/>
+    <p:sldId id="265" r:id="rId21"/>
+    <p:sldId id="270" r:id="rId22"/>
+    <p:sldId id="271" r:id="rId23"/>
   </p:sldIdLst>
   <p:sldSz cx="12192000" cy="6858000"/>
   <p:notesSz cx="6858000" cy="9144000"/>
@@ -129,10 +130,10 @@
       <p14:sectionLst xmlns:p14="http://schemas.microsoft.com/office/powerpoint/2010/main">
         <p14:section name="Default Section" id="{D7E4E843-52D9-6C48-912F-91CBA09DF476}">
           <p14:sldIdLst>
+            <p14:sldId id="278"/>
             <p14:sldId id="256"/>
             <p14:sldId id="257"/>
             <p14:sldId id="273"/>
-            <p14:sldId id="258"/>
             <p14:sldId id="262"/>
             <p14:sldId id="272"/>
             <p14:sldId id="274"/>
@@ -156,6 +157,7 @@
         </p14:section>
         <p14:section name="Map Types" id="{D630A8AD-C3BA-F848-B371-06EE1B11B436}">
           <p14:sldIdLst>
+            <p14:sldId id="277"/>
             <p14:sldId id="263"/>
             <p14:sldId id="264"/>
             <p14:sldId id="276"/>
@@ -3695,7 +3697,7 @@
           <p:cNvPr id="2" name="Title 1">
             <a:extLst>
               <a:ext uri="{FF2B5EF4-FFF2-40B4-BE49-F238E27FC236}">
-                <a16:creationId xmlns:a16="http://schemas.microsoft.com/office/drawing/2014/main" id="{41217311-FECD-5783-A184-A887E747C2BE}"/>
+                <a16:creationId xmlns:a16="http://schemas.microsoft.com/office/drawing/2014/main" id="{458136BA-DBEF-124B-5023-EDA6E5A6B00B}"/>
               </a:ext>
             </a:extLst>
           </p:cNvPr>
@@ -3703,7 +3705,7 @@
             <a:spLocks noGrp="1"/>
           </p:cNvSpPr>
           <p:nvPr>
-            <p:ph type="ctrTitle"/>
+            <p:ph type="title"/>
           </p:nvPr>
         </p:nvSpPr>
         <p:spPr/>
@@ -3713,17 +3715,17 @@
           <a:p>
             <a:r>
               <a:rPr lang="en-US" dirty="0"/>
-              <a:t>Color</a:t>
-            </a:r>
-          </a:p>
-        </p:txBody>
-      </p:sp>
-      <p:sp>
-        <p:nvSpPr>
-          <p:cNvPr id="3" name="Subtitle 2">
+              <a:t>Housekeeping</a:t>
+            </a:r>
+          </a:p>
+        </p:txBody>
+      </p:sp>
+      <p:sp>
+        <p:nvSpPr>
+          <p:cNvPr id="3" name="Content Placeholder 2">
             <a:extLst>
               <a:ext uri="{FF2B5EF4-FFF2-40B4-BE49-F238E27FC236}">
-                <a16:creationId xmlns:a16="http://schemas.microsoft.com/office/drawing/2014/main" id="{F112E2BD-11AD-EAB0-9C95-2E389C4BAB5C}"/>
+                <a16:creationId xmlns:a16="http://schemas.microsoft.com/office/drawing/2014/main" id="{C8F2A34F-A64E-4542-B798-A80EBEE509D8}"/>
               </a:ext>
             </a:extLst>
           </p:cNvPr>
@@ -3731,7 +3733,7 @@
             <a:spLocks noGrp="1"/>
           </p:cNvSpPr>
           <p:nvPr>
-            <p:ph type="subTitle" idx="1"/>
+            <p:ph idx="1"/>
           </p:nvPr>
         </p:nvSpPr>
         <p:spPr/>
@@ -3739,14 +3741,46 @@
           <a:bodyPr/>
           <a:lstStyle/>
           <a:p>
-            <a:endParaRPr lang="en-US"/>
+            <a:r>
+              <a:rPr lang="en-US" dirty="0"/>
+              <a:t>Today:</a:t>
+            </a:r>
+          </a:p>
+          <a:p>
+            <a:pPr lvl="1"/>
+            <a:r>
+              <a:rPr lang="en-US" dirty="0"/>
+              <a:t>Color (chapter 4). </a:t>
+            </a:r>
+          </a:p>
+          <a:p>
+            <a:pPr lvl="1"/>
+            <a:r>
+              <a:rPr lang="en-US" dirty="0"/>
+              <a:t>Intro to </a:t>
+            </a:r>
+            <a:r>
+              <a:rPr lang="en-US"/>
+              <a:t>Maps exercise (Intro to maps zip file in repository). </a:t>
+            </a:r>
+            <a:endParaRPr lang="en-US" dirty="0"/>
+          </a:p>
+          <a:p>
+            <a:pPr lvl="1"/>
+            <a:r>
+              <a:rPr lang="en-US" dirty="0"/>
+              <a:t>Try to use H&amp;M dataset to display something. </a:t>
+            </a:r>
+          </a:p>
+          <a:p>
+            <a:endParaRPr lang="en-US" dirty="0"/>
           </a:p>
         </p:txBody>
       </p:sp>
     </p:spTree>
     <p:extLst>
       <p:ext uri="{BB962C8B-B14F-4D97-AF65-F5344CB8AC3E}">
-        <p14:creationId xmlns:p14="http://schemas.microsoft.com/office/powerpoint/2010/main" val="643019074"/>
+        <p14:creationId xmlns:p14="http://schemas.microsoft.com/office/powerpoint/2010/main" val="1023638129"/>
       </p:ext>
     </p:extLst>
   </p:cSld>
@@ -4404,7 +4438,7 @@
 </file>
 
 <file path=ppt/slides/slide14.xml><?xml version="1.0" encoding="utf-8"?>
-<p:sld xmlns:a="http://schemas.openxmlformats.org/drawingml/2006/main" xmlns:r="http://schemas.openxmlformats.org/officeDocument/2006/relationships" xmlns:p="http://schemas.openxmlformats.org/presentationml/2006/main" show="0">
+<p:sld xmlns:a="http://schemas.openxmlformats.org/drawingml/2006/main" xmlns:r="http://schemas.openxmlformats.org/officeDocument/2006/relationships" xmlns:p="http://schemas.openxmlformats.org/presentationml/2006/main">
   <p:cSld>
     <p:spTree>
       <p:nvGrpSpPr>
@@ -4547,7 +4581,7 @@
 </file>
 
 <file path=ppt/slides/slide15.xml><?xml version="1.0" encoding="utf-8"?>
-<p:sld xmlns:a="http://schemas.openxmlformats.org/drawingml/2006/main" xmlns:r="http://schemas.openxmlformats.org/officeDocument/2006/relationships" xmlns:p="http://schemas.openxmlformats.org/presentationml/2006/main" show="0">
+<p:sld xmlns:a="http://schemas.openxmlformats.org/drawingml/2006/main" xmlns:r="http://schemas.openxmlformats.org/officeDocument/2006/relationships" xmlns:p="http://schemas.openxmlformats.org/presentationml/2006/main">
   <p:cSld>
     <p:spTree>
       <p:nvGrpSpPr>
@@ -4586,12 +4620,21 @@
           </a:xfrm>
         </p:spPr>
         <p:txBody>
-          <a:bodyPr/>
+          <a:bodyPr>
+            <a:normAutofit/>
+          </a:bodyPr>
           <a:lstStyle/>
           <a:p>
             <a:r>
               <a:rPr lang="en-US" dirty="0"/>
               <a:t>Focus (excessively) on the “per” part of Groups</a:t>
+            </a:r>
+            <a:br>
+              <a:rPr lang="en-US" dirty="0"/>
+            </a:br>
+            <a:r>
+              <a:rPr lang="en-US" dirty="0"/>
+              <a:t>(Granularity)</a:t>
             </a:r>
           </a:p>
         </p:txBody>
@@ -4697,6 +4740,132 @@
 </file>
 
 <file path=ppt/slides/slide16.xml><?xml version="1.0" encoding="utf-8"?>
+<p:sld xmlns:a="http://schemas.openxmlformats.org/drawingml/2006/main" xmlns:r="http://schemas.openxmlformats.org/officeDocument/2006/relationships" xmlns:p="http://schemas.openxmlformats.org/presentationml/2006/main">
+  <p:cSld>
+    <p:spTree>
+      <p:nvGrpSpPr>
+        <p:cNvPr id="1" name=""/>
+        <p:cNvGrpSpPr/>
+        <p:nvPr/>
+      </p:nvGrpSpPr>
+      <p:grpSpPr>
+        <a:xfrm>
+          <a:off x="0" y="0"/>
+          <a:ext cx="0" cy="0"/>
+          <a:chOff x="0" y="0"/>
+          <a:chExt cx="0" cy="0"/>
+        </a:xfrm>
+      </p:grpSpPr>
+      <p:sp>
+        <p:nvSpPr>
+          <p:cNvPr id="2" name="Title 1">
+            <a:extLst>
+              <a:ext uri="{FF2B5EF4-FFF2-40B4-BE49-F238E27FC236}">
+                <a16:creationId xmlns:a16="http://schemas.microsoft.com/office/drawing/2014/main" id="{DC7B15F9-9E9C-0E3A-5C81-E33A8DDBB1EB}"/>
+              </a:ext>
+            </a:extLst>
+          </p:cNvPr>
+          <p:cNvSpPr>
+            <a:spLocks noGrp="1"/>
+          </p:cNvSpPr>
+          <p:nvPr>
+            <p:ph type="title"/>
+          </p:nvPr>
+        </p:nvSpPr>
+        <p:spPr/>
+        <p:txBody>
+          <a:bodyPr/>
+          <a:lstStyle/>
+          <a:p>
+            <a:r>
+              <a:rPr lang="en-US" dirty="0"/>
+              <a:t>Maps (and Color)</a:t>
+            </a:r>
+          </a:p>
+        </p:txBody>
+      </p:sp>
+      <p:sp>
+        <p:nvSpPr>
+          <p:cNvPr id="3" name="Content Placeholder 2">
+            <a:extLst>
+              <a:ext uri="{FF2B5EF4-FFF2-40B4-BE49-F238E27FC236}">
+                <a16:creationId xmlns:a16="http://schemas.microsoft.com/office/drawing/2014/main" id="{E027B0C1-7D5F-42A6-DA7C-DE59411776A9}"/>
+              </a:ext>
+            </a:extLst>
+          </p:cNvPr>
+          <p:cNvSpPr>
+            <a:spLocks noGrp="1"/>
+          </p:cNvSpPr>
+          <p:nvPr>
+            <p:ph idx="1"/>
+          </p:nvPr>
+        </p:nvSpPr>
+        <p:spPr/>
+        <p:txBody>
+          <a:bodyPr/>
+          <a:lstStyle/>
+          <a:p>
+            <a:r>
+              <a:rPr lang="en-US" dirty="0"/>
+              <a:t>One common usage of colors are maps. </a:t>
+            </a:r>
+          </a:p>
+          <a:p>
+            <a:r>
+              <a:rPr lang="en-US" dirty="0"/>
+              <a:t>We can map stuff whenever we have either:</a:t>
+            </a:r>
+          </a:p>
+          <a:p>
+            <a:pPr lvl="1"/>
+            <a:r>
+              <a:rPr lang="en-US" dirty="0"/>
+              <a:t>A set of locations – latitude and longitude. </a:t>
+            </a:r>
+          </a:p>
+          <a:p>
+            <a:pPr lvl="1"/>
+            <a:r>
+              <a:rPr lang="en-US" dirty="0"/>
+              <a:t>A set of geographical regions – city, state, province, country. </a:t>
+            </a:r>
+          </a:p>
+          <a:p>
+            <a:r>
+              <a:rPr lang="en-US" dirty="0"/>
+              <a:t>We can map some other stuff (like neighborhoods) but that requires more:</a:t>
+            </a:r>
+          </a:p>
+          <a:p>
+            <a:pPr lvl="1"/>
+            <a:r>
+              <a:rPr lang="en-US" dirty="0"/>
+              <a:t>Spatial data files (~data defining geographical things). </a:t>
+            </a:r>
+          </a:p>
+          <a:p>
+            <a:pPr lvl="1"/>
+            <a:r>
+              <a:rPr lang="en-US" dirty="0"/>
+              <a:t>Joins </a:t>
+            </a:r>
+          </a:p>
+        </p:txBody>
+      </p:sp>
+    </p:spTree>
+    <p:extLst>
+      <p:ext uri="{BB962C8B-B14F-4D97-AF65-F5344CB8AC3E}">
+        <p14:creationId xmlns:p14="http://schemas.microsoft.com/office/powerpoint/2010/main" val="1245130227"/>
+      </p:ext>
+    </p:extLst>
+  </p:cSld>
+  <p:clrMapOvr>
+    <a:masterClrMapping/>
+  </p:clrMapOvr>
+</p:sld>
+</file>
+
+<file path=ppt/slides/slide17.xml><?xml version="1.0" encoding="utf-8"?>
 <p:sld xmlns:a="http://schemas.openxmlformats.org/drawingml/2006/main" xmlns:r="http://schemas.openxmlformats.org/officeDocument/2006/relationships" xmlns:p="http://schemas.openxmlformats.org/presentationml/2006/main">
   <p:cSld>
     <p:bg>
@@ -5163,7 +5332,7 @@
 </p:sld>
 </file>
 
-<file path=ppt/slides/slide17.xml><?xml version="1.0" encoding="utf-8"?>
+<file path=ppt/slides/slide18.xml><?xml version="1.0" encoding="utf-8"?>
 <p:sld xmlns:a="http://schemas.openxmlformats.org/drawingml/2006/main" xmlns:r="http://schemas.openxmlformats.org/officeDocument/2006/relationships" xmlns:p="http://schemas.openxmlformats.org/presentationml/2006/main">
   <p:cSld>
     <p:spTree>
@@ -5301,172 +5470,6 @@
 </p:sld>
 </file>
 
-<file path=ppt/slides/slide18.xml><?xml version="1.0" encoding="utf-8"?>
-<p:sld xmlns:a="http://schemas.openxmlformats.org/drawingml/2006/main" xmlns:r="http://schemas.openxmlformats.org/officeDocument/2006/relationships" xmlns:p="http://schemas.openxmlformats.org/presentationml/2006/main">
-  <p:cSld>
-    <p:spTree>
-      <p:nvGrpSpPr>
-        <p:cNvPr id="1" name=""/>
-        <p:cNvGrpSpPr/>
-        <p:nvPr/>
-      </p:nvGrpSpPr>
-      <p:grpSpPr>
-        <a:xfrm>
-          <a:off x="0" y="0"/>
-          <a:ext cx="0" cy="0"/>
-          <a:chOff x="0" y="0"/>
-          <a:chExt cx="0" cy="0"/>
-        </a:xfrm>
-      </p:grpSpPr>
-      <p:sp>
-        <p:nvSpPr>
-          <p:cNvPr id="2" name="Title 1">
-            <a:extLst>
-              <a:ext uri="{FF2B5EF4-FFF2-40B4-BE49-F238E27FC236}">
-                <a16:creationId xmlns:a16="http://schemas.microsoft.com/office/drawing/2014/main" id="{DC5687B4-122C-A850-DA01-562912AC0426}"/>
-              </a:ext>
-            </a:extLst>
-          </p:cNvPr>
-          <p:cNvSpPr>
-            <a:spLocks noGrp="1"/>
-          </p:cNvSpPr>
-          <p:nvPr>
-            <p:ph type="title"/>
-          </p:nvPr>
-        </p:nvSpPr>
-        <p:spPr/>
-        <p:txBody>
-          <a:bodyPr/>
-          <a:lstStyle/>
-          <a:p>
-            <a:r>
-              <a:rPr lang="en-US" dirty="0" err="1"/>
-              <a:t>TabMaps</a:t>
-            </a:r>
-            <a:endParaRPr lang="en-US" dirty="0"/>
-          </a:p>
-        </p:txBody>
-      </p:sp>
-      <p:sp>
-        <p:nvSpPr>
-          <p:cNvPr id="3" name="Content Placeholder 2">
-            <a:extLst>
-              <a:ext uri="{FF2B5EF4-FFF2-40B4-BE49-F238E27FC236}">
-                <a16:creationId xmlns:a16="http://schemas.microsoft.com/office/drawing/2014/main" id="{7FF9EB63-8B13-E2CC-4C93-741EA7BFA65F}"/>
-              </a:ext>
-            </a:extLst>
-          </p:cNvPr>
-          <p:cNvSpPr>
-            <a:spLocks noGrp="1"/>
-          </p:cNvSpPr>
-          <p:nvPr>
-            <p:ph idx="1"/>
-          </p:nvPr>
-        </p:nvSpPr>
-        <p:spPr>
-          <a:xfrm>
-            <a:off x="1451579" y="1853755"/>
-            <a:ext cx="10068068" cy="4199726"/>
-          </a:xfrm>
-        </p:spPr>
-        <p:txBody>
-          <a:bodyPr/>
-          <a:lstStyle/>
-          <a:p>
-            <a:r>
-              <a:rPr lang="en-US" dirty="0"/>
-              <a:t>Mapping is generally pretty easy in Tableau, as long as a few requirements are met:</a:t>
-            </a:r>
-          </a:p>
-          <a:p>
-            <a:pPr lvl="1"/>
-            <a:r>
-              <a:rPr lang="en-US" dirty="0"/>
-              <a:t>To make a filled map, your data must have a region (state/prov/country)*. </a:t>
-            </a:r>
-          </a:p>
-          <a:p>
-            <a:pPr lvl="1"/>
-            <a:r>
-              <a:rPr lang="en-US" dirty="0"/>
-              <a:t>To make a point map, your data must have latitude and longitude (or point). </a:t>
-            </a:r>
-          </a:p>
-          <a:p>
-            <a:pPr lvl="1"/>
-            <a:r>
-              <a:rPr lang="en-US" dirty="0"/>
-              <a:t>*You can do some translation here if joining with other spatial files, more later. </a:t>
-            </a:r>
-          </a:p>
-          <a:p>
-            <a:r>
-              <a:rPr lang="en-US" dirty="0"/>
-              <a:t>Mapping data is usually identified correctly, but you may need to fix:</a:t>
-            </a:r>
-          </a:p>
-          <a:p>
-            <a:pPr lvl="1"/>
-            <a:r>
-              <a:rPr lang="en-US" dirty="0"/>
-              <a:t>Right click menu from the variable has options to change interpreted type. </a:t>
-            </a:r>
-          </a:p>
-          <a:p>
-            <a:pPr lvl="1"/>
-            <a:r>
-              <a:rPr lang="en-US" dirty="0"/>
-              <a:t>Lat/</a:t>
-            </a:r>
-            <a:r>
-              <a:rPr lang="en-US" dirty="0" err="1"/>
-              <a:t>lon</a:t>
-            </a:r>
-            <a:r>
-              <a:rPr lang="en-US" dirty="0"/>
-              <a:t> – may need to manually label them. </a:t>
-            </a:r>
-          </a:p>
-          <a:p>
-            <a:pPr lvl="1"/>
-            <a:r>
-              <a:rPr lang="en-US" dirty="0"/>
-              <a:t>State/Province/Country – may need to separate parts, label, or correct missing data interpretation. </a:t>
-            </a:r>
-          </a:p>
-          <a:p>
-            <a:r>
-              <a:rPr lang="en-US" dirty="0"/>
-              <a:t>Neighborhoods, regions, areas – not filled mappable, unless you add another spatial file. </a:t>
-            </a:r>
-          </a:p>
-          <a:p>
-            <a:pPr lvl="1"/>
-            <a:r>
-              <a:rPr lang="en-US" dirty="0"/>
-              <a:t>If using City data, pay attention to this if you want to </a:t>
-            </a:r>
-            <a:r>
-              <a:rPr lang="en-US"/>
-              <a:t>map something like a ‘hood or ward. </a:t>
-            </a:r>
-            <a:endParaRPr lang="en-US" dirty="0"/>
-          </a:p>
-        </p:txBody>
-      </p:sp>
-    </p:spTree>
-    <p:extLst>
-      <p:ext uri="{BB962C8B-B14F-4D97-AF65-F5344CB8AC3E}">
-        <p14:creationId xmlns:p14="http://schemas.microsoft.com/office/powerpoint/2010/main" val="3658273430"/>
-      </p:ext>
-    </p:extLst>
-  </p:cSld>
-  <p:clrMapOvr>
-    <a:masterClrMapping/>
-  </p:clrMapOvr>
-</p:sld>
-</file>
-
 <file path=ppt/slides/slide19.xml><?xml version="1.0" encoding="utf-8"?>
 <p:sld xmlns:a="http://schemas.openxmlformats.org/drawingml/2006/main" xmlns:r="http://schemas.openxmlformats.org/officeDocument/2006/relationships" xmlns:p="http://schemas.openxmlformats.org/presentationml/2006/main">
   <p:cSld>
@@ -5489,7 +5492,7 @@
           <p:cNvPr id="2" name="Title 1">
             <a:extLst>
               <a:ext uri="{FF2B5EF4-FFF2-40B4-BE49-F238E27FC236}">
-                <a16:creationId xmlns:a16="http://schemas.microsoft.com/office/drawing/2014/main" id="{FC5358D1-124B-9C97-36F8-4A7A7BF7F22A}"/>
+                <a16:creationId xmlns:a16="http://schemas.microsoft.com/office/drawing/2014/main" id="{DC5687B4-122C-A850-DA01-562912AC0426}"/>
               </a:ext>
             </a:extLst>
           </p:cNvPr>
@@ -5506,9 +5509,10 @@
           <a:lstStyle/>
           <a:p>
             <a:r>
-              <a:rPr lang="en-US" dirty="0"/>
-              <a:t>Colorblindness</a:t>
-            </a:r>
+              <a:rPr lang="en-US" dirty="0" err="1"/>
+              <a:t>TabMaps</a:t>
+            </a:r>
+            <a:endParaRPr lang="en-US" dirty="0"/>
           </a:p>
         </p:txBody>
       </p:sp>
@@ -5517,7 +5521,7 @@
           <p:cNvPr id="3" name="Content Placeholder 2">
             <a:extLst>
               <a:ext uri="{FF2B5EF4-FFF2-40B4-BE49-F238E27FC236}">
-                <a16:creationId xmlns:a16="http://schemas.microsoft.com/office/drawing/2014/main" id="{753DB0B6-F29D-D201-190F-6F62ADB7CD99}"/>
+                <a16:creationId xmlns:a16="http://schemas.microsoft.com/office/drawing/2014/main" id="{7FF9EB63-8B13-E2CC-4C93-741EA7BFA65F}"/>
               </a:ext>
             </a:extLst>
           </p:cNvPr>
@@ -5530,8 +5534,8 @@
         </p:nvSpPr>
         <p:spPr>
           <a:xfrm>
-            <a:off x="1451579" y="1853754"/>
-            <a:ext cx="9603275" cy="4199727"/>
+            <a:off x="1451579" y="1853755"/>
+            <a:ext cx="10068068" cy="4199726"/>
           </a:xfrm>
         </p:spPr>
         <p:txBody>
@@ -5540,54 +5544,104 @@
           <a:p>
             <a:r>
               <a:rPr lang="en-US" dirty="0"/>
-              <a:t>When choosing color schemes we want to consider colorblindness. </a:t>
-            </a:r>
-          </a:p>
-          <a:p>
-            <a:r>
-              <a:rPr lang="en-US" dirty="0"/>
-              <a:t>Red/green tends to be the most common issue. </a:t>
+              <a:t>Mapping is generally pretty easy in Tableau, as long as a few requirements are met:</a:t>
             </a:r>
           </a:p>
           <a:p>
             <a:pPr lvl="1"/>
             <a:r>
               <a:rPr lang="en-US" dirty="0"/>
-              <a:t>Note for things like financial data – things with red/green also have brackets or negatives to be clear. </a:t>
-            </a:r>
-          </a:p>
-          <a:p>
-            <a:r>
-              <a:rPr lang="en-US" dirty="0"/>
-              <a:t>Default color schemes in Tableau (blue/orange) is colorblind friendly. </a:t>
-            </a:r>
-          </a:p>
-          <a:p>
-            <a:r>
-              <a:rPr lang="en-US" dirty="0"/>
-              <a:t>Even outside of colorblind concerns, color schemes should be clear:</a:t>
+              <a:t>To make a </a:t>
+            </a:r>
+            <a:r>
+              <a:rPr lang="en-US" b="1" dirty="0"/>
+              <a:t>filled map</a:t>
+            </a:r>
+            <a:r>
+              <a:rPr lang="en-US" dirty="0"/>
+              <a:t>, your data must have a </a:t>
+            </a:r>
+            <a:r>
+              <a:rPr lang="en-US" b="1" dirty="0"/>
+              <a:t>region</a:t>
+            </a:r>
+            <a:r>
+              <a:rPr lang="en-US" dirty="0"/>
+              <a:t> (state/prov/country)*. </a:t>
             </a:r>
           </a:p>
           <a:p>
             <a:pPr lvl="1"/>
             <a:r>
               <a:rPr lang="en-US" dirty="0"/>
-              <a:t>Don’t have colors that are hard to see/differentiate. </a:t>
+              <a:t>To make a </a:t>
+            </a:r>
+            <a:r>
+              <a:rPr lang="en-US" b="1" dirty="0"/>
+              <a:t>point map</a:t>
+            </a:r>
+            <a:r>
+              <a:rPr lang="en-US" dirty="0"/>
+              <a:t>, your data must have </a:t>
+            </a:r>
+            <a:r>
+              <a:rPr lang="en-US" b="1" dirty="0"/>
+              <a:t>latitude and longitude (or point). </a:t>
             </a:r>
           </a:p>
           <a:p>
             <a:pPr lvl="1"/>
             <a:r>
               <a:rPr lang="en-US" dirty="0"/>
-              <a:t>Don’t accidentally imply things with colors (red=bad, green=good, darker=higher, same color=same thing, </a:t>
+              <a:t>*You can do some translation here if joining with other spatial files, more later. </a:t>
+            </a:r>
+          </a:p>
+          <a:p>
+            <a:r>
+              <a:rPr lang="en-US" dirty="0"/>
+              <a:t>Mapping data is usually identified correctly, but you may need to fix:</a:t>
+            </a:r>
+          </a:p>
+          <a:p>
+            <a:pPr lvl="1"/>
+            <a:r>
+              <a:rPr lang="en-US" dirty="0"/>
+              <a:t>Right click menu from the variable has options to change interpreted type. </a:t>
+            </a:r>
+          </a:p>
+          <a:p>
+            <a:pPr lvl="1"/>
+            <a:r>
+              <a:rPr lang="en-US" dirty="0"/>
+              <a:t>Lat/</a:t>
             </a:r>
             <a:r>
               <a:rPr lang="en-US" dirty="0" err="1"/>
-              <a:t>etc</a:t>
-            </a:r>
-            <a:r>
-              <a:rPr lang="en-US" dirty="0"/>
-              <a:t>…) </a:t>
+              <a:t>lon</a:t>
+            </a:r>
+            <a:r>
+              <a:rPr lang="en-US" dirty="0"/>
+              <a:t> – may need to manually label them. </a:t>
+            </a:r>
+          </a:p>
+          <a:p>
+            <a:pPr lvl="1"/>
+            <a:r>
+              <a:rPr lang="en-US" dirty="0"/>
+              <a:t>State/Province/Country – may need to separate parts, label, or correct missing data interpretation. </a:t>
+            </a:r>
+          </a:p>
+          <a:p>
+            <a:r>
+              <a:rPr lang="en-US" dirty="0"/>
+              <a:t>Neighborhoods, regions, areas – not filled mappable, unless you add another spatial file. </a:t>
+            </a:r>
+          </a:p>
+          <a:p>
+            <a:pPr lvl="1"/>
+            <a:r>
+              <a:rPr lang="en-US" dirty="0"/>
+              <a:t>If using City data, pay attention to this if you want to map something like a ‘hood or ward. </a:t>
             </a:r>
           </a:p>
         </p:txBody>
@@ -5595,7 +5649,7 @@
     </p:spTree>
     <p:extLst>
       <p:ext uri="{BB962C8B-B14F-4D97-AF65-F5344CB8AC3E}">
-        <p14:creationId xmlns:p14="http://schemas.microsoft.com/office/powerpoint/2010/main" val="1727825313"/>
+        <p14:creationId xmlns:p14="http://schemas.microsoft.com/office/powerpoint/2010/main" val="3658273430"/>
       </p:ext>
     </p:extLst>
   </p:cSld>
@@ -5627,7 +5681,7 @@
           <p:cNvPr id="2" name="Title 1">
             <a:extLst>
               <a:ext uri="{FF2B5EF4-FFF2-40B4-BE49-F238E27FC236}">
-                <a16:creationId xmlns:a16="http://schemas.microsoft.com/office/drawing/2014/main" id="{ABF595E8-8FAB-830A-C43A-5427ECB2642C}"/>
+                <a16:creationId xmlns:a16="http://schemas.microsoft.com/office/drawing/2014/main" id="{41217311-FECD-5783-A184-A887E747C2BE}"/>
               </a:ext>
             </a:extLst>
           </p:cNvPr>
@@ -5635,7 +5689,7 @@
             <a:spLocks noGrp="1"/>
           </p:cNvSpPr>
           <p:nvPr>
-            <p:ph type="title"/>
+            <p:ph type="ctrTitle"/>
           </p:nvPr>
         </p:nvSpPr>
         <p:spPr/>
@@ -5645,17 +5699,17 @@
           <a:p>
             <a:r>
               <a:rPr lang="en-US" dirty="0"/>
-              <a:t>Color in Visualization</a:t>
-            </a:r>
-          </a:p>
-        </p:txBody>
-      </p:sp>
-      <p:sp>
-        <p:nvSpPr>
-          <p:cNvPr id="3" name="Content Placeholder 2">
+              <a:t>Color</a:t>
+            </a:r>
+          </a:p>
+        </p:txBody>
+      </p:sp>
+      <p:sp>
+        <p:nvSpPr>
+          <p:cNvPr id="3" name="Subtitle 2">
             <a:extLst>
               <a:ext uri="{FF2B5EF4-FFF2-40B4-BE49-F238E27FC236}">
-                <a16:creationId xmlns:a16="http://schemas.microsoft.com/office/drawing/2014/main" id="{B7FF1426-AD89-21E6-B6BC-2AB3E5CF684D}"/>
+                <a16:creationId xmlns:a16="http://schemas.microsoft.com/office/drawing/2014/main" id="{F112E2BD-11AD-EAB0-9C95-2E389C4BAB5C}"/>
               </a:ext>
             </a:extLst>
           </p:cNvPr>
@@ -5663,93 +5717,22 @@
             <a:spLocks noGrp="1"/>
           </p:cNvSpPr>
           <p:nvPr>
-            <p:ph idx="1"/>
-          </p:nvPr>
-        </p:nvSpPr>
-        <p:spPr>
-          <a:xfrm>
-            <a:off x="1451579" y="1944413"/>
-            <a:ext cx="9603275" cy="4109067"/>
-          </a:xfrm>
-        </p:spPr>
-        <p:txBody>
-          <a:bodyPr/>
-          <a:lstStyle/>
-          <a:p>
-            <a:r>
-              <a:rPr lang="en-US" dirty="0"/>
-              <a:t>Color is a primary feature in visualizations. </a:t>
-            </a:r>
-          </a:p>
-          <a:p>
-            <a:pPr lvl="1"/>
-            <a:r>
-              <a:rPr lang="en-US" dirty="0"/>
-              <a:t>Most visualizations can have color added pretty easily. </a:t>
-            </a:r>
-          </a:p>
-          <a:p>
-            <a:r>
-              <a:rPr lang="en-US" dirty="0"/>
-              <a:t>We can encode, or represent data from variables via color:</a:t>
-            </a:r>
-          </a:p>
-          <a:p>
-            <a:pPr lvl="1"/>
-            <a:r>
-              <a:rPr lang="en-US" dirty="0"/>
-              <a:t>Numeric variables can be represented with a gradient. </a:t>
-            </a:r>
-          </a:p>
-          <a:p>
-            <a:pPr lvl="1"/>
-            <a:r>
-              <a:rPr lang="en-US" dirty="0"/>
-              <a:t>Categorical variables can be represented with different colors. </a:t>
-            </a:r>
-          </a:p>
-          <a:p>
-            <a:r>
-              <a:rPr lang="en-US" dirty="0"/>
-              <a:t>Color is one of the most prevalent </a:t>
-            </a:r>
-            <a:r>
-              <a:rPr lang="en-US" dirty="0" err="1"/>
-              <a:t>preattentive</a:t>
-            </a:r>
-            <a:r>
-              <a:rPr lang="en-US" dirty="0"/>
-              <a:t> attributes.</a:t>
-            </a:r>
-          </a:p>
-          <a:p>
-            <a:pPr lvl="1"/>
-            <a:r>
-              <a:rPr lang="en-US" dirty="0"/>
-              <a:t>We have preexisting understanding of many color things – red/green, dark/light, </a:t>
-            </a:r>
-            <a:r>
-              <a:rPr lang="en-US" dirty="0" err="1"/>
-              <a:t>etc</a:t>
-            </a:r>
-            <a:r>
-              <a:rPr lang="en-US" dirty="0"/>
-              <a:t>…</a:t>
-            </a:r>
-          </a:p>
-          <a:p>
-            <a:pPr lvl="1"/>
-            <a:r>
-              <a:rPr lang="en-US" dirty="0"/>
-              <a:t>We notice color quickly and our brain categorizes/orders based on it.  </a:t>
-            </a:r>
+            <p:ph type="subTitle" idx="1"/>
+          </p:nvPr>
+        </p:nvSpPr>
+        <p:spPr/>
+        <p:txBody>
+          <a:bodyPr/>
+          <a:lstStyle/>
+          <a:p>
+            <a:endParaRPr lang="en-US"/>
           </a:p>
         </p:txBody>
       </p:sp>
     </p:spTree>
     <p:extLst>
       <p:ext uri="{BB962C8B-B14F-4D97-AF65-F5344CB8AC3E}">
-        <p14:creationId xmlns:p14="http://schemas.microsoft.com/office/powerpoint/2010/main" val="2817652377"/>
+        <p14:creationId xmlns:p14="http://schemas.microsoft.com/office/powerpoint/2010/main" val="643019074"/>
       </p:ext>
     </p:extLst>
   </p:cSld>
@@ -5781,7 +5764,7 @@
           <p:cNvPr id="2" name="Title 1">
             <a:extLst>
               <a:ext uri="{FF2B5EF4-FFF2-40B4-BE49-F238E27FC236}">
-                <a16:creationId xmlns:a16="http://schemas.microsoft.com/office/drawing/2014/main" id="{0DF21A89-2CD6-B432-70B8-64058E67DA89}"/>
+                <a16:creationId xmlns:a16="http://schemas.microsoft.com/office/drawing/2014/main" id="{FC5358D1-124B-9C97-36F8-4A7A7BF7F22A}"/>
               </a:ext>
             </a:extLst>
           </p:cNvPr>
@@ -5799,7 +5782,7 @@
           <a:p>
             <a:r>
               <a:rPr lang="en-US" dirty="0"/>
-              <a:t>Color and Concerns Adding Density</a:t>
+              <a:t>Colorblindness</a:t>
             </a:r>
           </a:p>
         </p:txBody>
@@ -5809,7 +5792,7 @@
           <p:cNvPr id="3" name="Content Placeholder 2">
             <a:extLst>
               <a:ext uri="{FF2B5EF4-FFF2-40B4-BE49-F238E27FC236}">
-                <a16:creationId xmlns:a16="http://schemas.microsoft.com/office/drawing/2014/main" id="{C387FE19-D97C-B44E-FE05-B4472537614B}"/>
+                <a16:creationId xmlns:a16="http://schemas.microsoft.com/office/drawing/2014/main" id="{753DB0B6-F29D-D201-190F-6F62ADB7CD99}"/>
               </a:ext>
             </a:extLst>
           </p:cNvPr>
@@ -5820,45 +5803,66 @@
             <p:ph idx="1"/>
           </p:nvPr>
         </p:nvSpPr>
-        <p:spPr/>
-        <p:txBody>
-          <a:bodyPr/>
-          <a:lstStyle/>
-          <a:p>
-            <a:r>
-              <a:rPr lang="en-US" dirty="0"/>
-              <a:t>Color is a common thing we can change to add some density to a chart. </a:t>
-            </a:r>
-          </a:p>
-          <a:p>
-            <a:r>
-              <a:rPr lang="en-US" dirty="0"/>
-              <a:t>Most chart types can have another metric added to the color. </a:t>
+        <p:spPr>
+          <a:xfrm>
+            <a:off x="1451579" y="1853754"/>
+            <a:ext cx="9603275" cy="4199727"/>
+          </a:xfrm>
+        </p:spPr>
+        <p:txBody>
+          <a:bodyPr/>
+          <a:lstStyle/>
+          <a:p>
+            <a:r>
+              <a:rPr lang="en-US" dirty="0"/>
+              <a:t>When choosing color schemes we want to consider colorblindness. </a:t>
+            </a:r>
+          </a:p>
+          <a:p>
+            <a:r>
+              <a:rPr lang="en-US" dirty="0"/>
+              <a:t>Red/green tends to be the most common issue. </a:t>
             </a:r>
           </a:p>
           <a:p>
             <a:pPr lvl="1"/>
             <a:r>
               <a:rPr lang="en-US" dirty="0"/>
-              <a:t>Commonly: use a color to show a continuous value on something like scatter plot mark. </a:t>
-            </a:r>
-          </a:p>
-          <a:p>
-            <a:r>
-              <a:rPr lang="en-US" dirty="0"/>
-              <a:t>Ensure the color scheme you pick makes sense and is clear. </a:t>
-            </a:r>
-          </a:p>
-          <a:p>
-            <a:r>
-              <a:rPr lang="en-US" dirty="0"/>
-              <a:t>Depart from known–good color schemes with caution. </a:t>
-            </a:r>
-          </a:p>
-          <a:p>
-            <a:r>
-              <a:rPr lang="en-US" dirty="0"/>
-              <a:t>Using color is good, except for where it is bad! </a:t>
+              <a:t>Note for things like financial data – things with red/green also have brackets or negatives to be clear. </a:t>
+            </a:r>
+          </a:p>
+          <a:p>
+            <a:r>
+              <a:rPr lang="en-US" dirty="0"/>
+              <a:t>Default color schemes in Tableau (blue/orange) is colorblind friendly. </a:t>
+            </a:r>
+          </a:p>
+          <a:p>
+            <a:r>
+              <a:rPr lang="en-US" dirty="0"/>
+              <a:t>Even outside of colorblind concerns, color schemes should be clear:</a:t>
+            </a:r>
+          </a:p>
+          <a:p>
+            <a:pPr lvl="1"/>
+            <a:r>
+              <a:rPr lang="en-US" dirty="0"/>
+              <a:t>Don’t have colors that are hard to see/differentiate. </a:t>
+            </a:r>
+          </a:p>
+          <a:p>
+            <a:pPr lvl="1"/>
+            <a:r>
+              <a:rPr lang="en-US" dirty="0"/>
+              <a:t>Don’t accidentally imply things with colors (red=bad, green=good, darker=higher, same color=same thing, </a:t>
+            </a:r>
+            <a:r>
+              <a:rPr lang="en-US" dirty="0" err="1"/>
+              <a:t>etc</a:t>
+            </a:r>
+            <a:r>
+              <a:rPr lang="en-US" dirty="0"/>
+              <a:t>…) </a:t>
             </a:r>
           </a:p>
         </p:txBody>
@@ -5866,7 +5870,7 @@
     </p:spTree>
     <p:extLst>
       <p:ext uri="{BB962C8B-B14F-4D97-AF65-F5344CB8AC3E}">
-        <p14:creationId xmlns:p14="http://schemas.microsoft.com/office/powerpoint/2010/main" val="3275622911"/>
+        <p14:creationId xmlns:p14="http://schemas.microsoft.com/office/powerpoint/2010/main" val="1727825313"/>
       </p:ext>
     </p:extLst>
   </p:cSld>
@@ -5898,6 +5902,123 @@
           <p:cNvPr id="2" name="Title 1">
             <a:extLst>
               <a:ext uri="{FF2B5EF4-FFF2-40B4-BE49-F238E27FC236}">
+                <a16:creationId xmlns:a16="http://schemas.microsoft.com/office/drawing/2014/main" id="{0DF21A89-2CD6-B432-70B8-64058E67DA89}"/>
+              </a:ext>
+            </a:extLst>
+          </p:cNvPr>
+          <p:cNvSpPr>
+            <a:spLocks noGrp="1"/>
+          </p:cNvSpPr>
+          <p:nvPr>
+            <p:ph type="title"/>
+          </p:nvPr>
+        </p:nvSpPr>
+        <p:spPr/>
+        <p:txBody>
+          <a:bodyPr/>
+          <a:lstStyle/>
+          <a:p>
+            <a:r>
+              <a:rPr lang="en-US" dirty="0"/>
+              <a:t>Color and Concerns Adding Density</a:t>
+            </a:r>
+          </a:p>
+        </p:txBody>
+      </p:sp>
+      <p:sp>
+        <p:nvSpPr>
+          <p:cNvPr id="3" name="Content Placeholder 2">
+            <a:extLst>
+              <a:ext uri="{FF2B5EF4-FFF2-40B4-BE49-F238E27FC236}">
+                <a16:creationId xmlns:a16="http://schemas.microsoft.com/office/drawing/2014/main" id="{C387FE19-D97C-B44E-FE05-B4472537614B}"/>
+              </a:ext>
+            </a:extLst>
+          </p:cNvPr>
+          <p:cNvSpPr>
+            <a:spLocks noGrp="1"/>
+          </p:cNvSpPr>
+          <p:nvPr>
+            <p:ph idx="1"/>
+          </p:nvPr>
+        </p:nvSpPr>
+        <p:spPr/>
+        <p:txBody>
+          <a:bodyPr/>
+          <a:lstStyle/>
+          <a:p>
+            <a:r>
+              <a:rPr lang="en-US" dirty="0"/>
+              <a:t>Color is a common thing we can change to add some density to a chart. </a:t>
+            </a:r>
+          </a:p>
+          <a:p>
+            <a:r>
+              <a:rPr lang="en-US" dirty="0"/>
+              <a:t>Most chart types can have another metric added to the color. </a:t>
+            </a:r>
+          </a:p>
+          <a:p>
+            <a:pPr lvl="1"/>
+            <a:r>
+              <a:rPr lang="en-US" dirty="0"/>
+              <a:t>Commonly: use a color to show a continuous value on something like scatter plot mark. </a:t>
+            </a:r>
+          </a:p>
+          <a:p>
+            <a:r>
+              <a:rPr lang="en-US" dirty="0"/>
+              <a:t>Ensure the color scheme you pick makes sense and is clear. </a:t>
+            </a:r>
+          </a:p>
+          <a:p>
+            <a:r>
+              <a:rPr lang="en-US" dirty="0"/>
+              <a:t>Depart from known–good color schemes with caution. </a:t>
+            </a:r>
+          </a:p>
+          <a:p>
+            <a:r>
+              <a:rPr lang="en-US" dirty="0"/>
+              <a:t>Using color is good, except for where it is bad! </a:t>
+            </a:r>
+          </a:p>
+        </p:txBody>
+      </p:sp>
+    </p:spTree>
+    <p:extLst>
+      <p:ext uri="{BB962C8B-B14F-4D97-AF65-F5344CB8AC3E}">
+        <p14:creationId xmlns:p14="http://schemas.microsoft.com/office/powerpoint/2010/main" val="3275622911"/>
+      </p:ext>
+    </p:extLst>
+  </p:cSld>
+  <p:clrMapOvr>
+    <a:masterClrMapping/>
+  </p:clrMapOvr>
+</p:sld>
+</file>
+
+<file path=ppt/slides/slide22.xml><?xml version="1.0" encoding="utf-8"?>
+<p:sld xmlns:a="http://schemas.openxmlformats.org/drawingml/2006/main" xmlns:r="http://schemas.openxmlformats.org/officeDocument/2006/relationships" xmlns:p="http://schemas.openxmlformats.org/presentationml/2006/main">
+  <p:cSld>
+    <p:spTree>
+      <p:nvGrpSpPr>
+        <p:cNvPr id="1" name=""/>
+        <p:cNvGrpSpPr/>
+        <p:nvPr/>
+      </p:nvGrpSpPr>
+      <p:grpSpPr>
+        <a:xfrm>
+          <a:off x="0" y="0"/>
+          <a:ext cx="0" cy="0"/>
+          <a:chOff x="0" y="0"/>
+          <a:chExt cx="0" cy="0"/>
+        </a:xfrm>
+      </p:grpSpPr>
+      <p:sp>
+        <p:nvSpPr>
+          <p:cNvPr id="2" name="Title 1">
+            <a:extLst>
+              <a:ext uri="{FF2B5EF4-FFF2-40B4-BE49-F238E27FC236}">
                 <a16:creationId xmlns:a16="http://schemas.microsoft.com/office/drawing/2014/main" id="{2E476656-2238-7069-2E61-1056E5AAEEB5}"/>
               </a:ext>
             </a:extLst>
@@ -6000,6 +6121,160 @@
 </file>
 
 <file path=ppt/slides/slide3.xml><?xml version="1.0" encoding="utf-8"?>
+<p:sld xmlns:a="http://schemas.openxmlformats.org/drawingml/2006/main" xmlns:r="http://schemas.openxmlformats.org/officeDocument/2006/relationships" xmlns:p="http://schemas.openxmlformats.org/presentationml/2006/main">
+  <p:cSld>
+    <p:spTree>
+      <p:nvGrpSpPr>
+        <p:cNvPr id="1" name=""/>
+        <p:cNvGrpSpPr/>
+        <p:nvPr/>
+      </p:nvGrpSpPr>
+      <p:grpSpPr>
+        <a:xfrm>
+          <a:off x="0" y="0"/>
+          <a:ext cx="0" cy="0"/>
+          <a:chOff x="0" y="0"/>
+          <a:chExt cx="0" cy="0"/>
+        </a:xfrm>
+      </p:grpSpPr>
+      <p:sp>
+        <p:nvSpPr>
+          <p:cNvPr id="2" name="Title 1">
+            <a:extLst>
+              <a:ext uri="{FF2B5EF4-FFF2-40B4-BE49-F238E27FC236}">
+                <a16:creationId xmlns:a16="http://schemas.microsoft.com/office/drawing/2014/main" id="{ABF595E8-8FAB-830A-C43A-5427ECB2642C}"/>
+              </a:ext>
+            </a:extLst>
+          </p:cNvPr>
+          <p:cNvSpPr>
+            <a:spLocks noGrp="1"/>
+          </p:cNvSpPr>
+          <p:nvPr>
+            <p:ph type="title"/>
+          </p:nvPr>
+        </p:nvSpPr>
+        <p:spPr/>
+        <p:txBody>
+          <a:bodyPr/>
+          <a:lstStyle/>
+          <a:p>
+            <a:r>
+              <a:rPr lang="en-US" dirty="0"/>
+              <a:t>Color in Visualization</a:t>
+            </a:r>
+          </a:p>
+        </p:txBody>
+      </p:sp>
+      <p:sp>
+        <p:nvSpPr>
+          <p:cNvPr id="3" name="Content Placeholder 2">
+            <a:extLst>
+              <a:ext uri="{FF2B5EF4-FFF2-40B4-BE49-F238E27FC236}">
+                <a16:creationId xmlns:a16="http://schemas.microsoft.com/office/drawing/2014/main" id="{B7FF1426-AD89-21E6-B6BC-2AB3E5CF684D}"/>
+              </a:ext>
+            </a:extLst>
+          </p:cNvPr>
+          <p:cNvSpPr>
+            <a:spLocks noGrp="1"/>
+          </p:cNvSpPr>
+          <p:nvPr>
+            <p:ph idx="1"/>
+          </p:nvPr>
+        </p:nvSpPr>
+        <p:spPr>
+          <a:xfrm>
+            <a:off x="1451579" y="1944413"/>
+            <a:ext cx="9603275" cy="4109067"/>
+          </a:xfrm>
+        </p:spPr>
+        <p:txBody>
+          <a:bodyPr/>
+          <a:lstStyle/>
+          <a:p>
+            <a:r>
+              <a:rPr lang="en-US" dirty="0"/>
+              <a:t>Color is a primary feature in visualizations. </a:t>
+            </a:r>
+          </a:p>
+          <a:p>
+            <a:pPr lvl="1"/>
+            <a:r>
+              <a:rPr lang="en-US" dirty="0"/>
+              <a:t>Most visualizations can have color added pretty easily. </a:t>
+            </a:r>
+          </a:p>
+          <a:p>
+            <a:r>
+              <a:rPr lang="en-US" dirty="0"/>
+              <a:t>We can encode, or represent data from variables via color:</a:t>
+            </a:r>
+          </a:p>
+          <a:p>
+            <a:pPr lvl="1"/>
+            <a:r>
+              <a:rPr lang="en-US" dirty="0"/>
+              <a:t>Numeric variables can be represented with a gradient. </a:t>
+            </a:r>
+          </a:p>
+          <a:p>
+            <a:pPr lvl="1"/>
+            <a:r>
+              <a:rPr lang="en-US" dirty="0"/>
+              <a:t>Categorical variables can be represented with different colors. </a:t>
+            </a:r>
+          </a:p>
+          <a:p>
+            <a:r>
+              <a:rPr lang="en-US" dirty="0"/>
+              <a:t>Color is one of the most prevalent </a:t>
+            </a:r>
+            <a:r>
+              <a:rPr lang="en-US" dirty="0" err="1"/>
+              <a:t>preattentive</a:t>
+            </a:r>
+            <a:r>
+              <a:rPr lang="en-US" dirty="0"/>
+              <a:t> attributes.</a:t>
+            </a:r>
+          </a:p>
+          <a:p>
+            <a:pPr lvl="1"/>
+            <a:r>
+              <a:rPr lang="en-US" dirty="0"/>
+              <a:t>We have preexisting understanding of many color things – red/green, dark/light, </a:t>
+            </a:r>
+            <a:r>
+              <a:rPr lang="en-US" dirty="0" err="1"/>
+              <a:t>etc</a:t>
+            </a:r>
+            <a:r>
+              <a:rPr lang="en-US" dirty="0"/>
+              <a:t>…</a:t>
+            </a:r>
+          </a:p>
+          <a:p>
+            <a:pPr lvl="1"/>
+            <a:r>
+              <a:rPr lang="en-US" dirty="0"/>
+              <a:t>We notice color quickly and our brain categorizes/orders based on it.  </a:t>
+            </a:r>
+          </a:p>
+        </p:txBody>
+      </p:sp>
+    </p:spTree>
+    <p:extLst>
+      <p:ext uri="{BB962C8B-B14F-4D97-AF65-F5344CB8AC3E}">
+        <p14:creationId xmlns:p14="http://schemas.microsoft.com/office/powerpoint/2010/main" val="2817652377"/>
+      </p:ext>
+    </p:extLst>
+  </p:cSld>
+  <p:clrMapOvr>
+    <a:masterClrMapping/>
+  </p:clrMapOvr>
+</p:sld>
+</file>
+
+<file path=ppt/slides/slide4.xml><?xml version="1.0" encoding="utf-8"?>
 <p:sld xmlns:a="http://schemas.openxmlformats.org/drawingml/2006/main" xmlns:r="http://schemas.openxmlformats.org/officeDocument/2006/relationships" xmlns:p="http://schemas.openxmlformats.org/presentationml/2006/main">
   <p:cSld>
     <p:spTree>
@@ -6117,86 +6392,6 @@
     <p:extLst>
       <p:ext uri="{BB962C8B-B14F-4D97-AF65-F5344CB8AC3E}">
         <p14:creationId xmlns:p14="http://schemas.microsoft.com/office/powerpoint/2010/main" val="2731412503"/>
-      </p:ext>
-    </p:extLst>
-  </p:cSld>
-  <p:clrMapOvr>
-    <a:masterClrMapping/>
-  </p:clrMapOvr>
-</p:sld>
-</file>
-
-<file path=ppt/slides/slide4.xml><?xml version="1.0" encoding="utf-8"?>
-<p:sld xmlns:a="http://schemas.openxmlformats.org/drawingml/2006/main" xmlns:r="http://schemas.openxmlformats.org/officeDocument/2006/relationships" xmlns:p="http://schemas.openxmlformats.org/presentationml/2006/main">
-  <p:cSld>
-    <p:spTree>
-      <p:nvGrpSpPr>
-        <p:cNvPr id="1" name=""/>
-        <p:cNvGrpSpPr/>
-        <p:nvPr/>
-      </p:nvGrpSpPr>
-      <p:grpSpPr>
-        <a:xfrm>
-          <a:off x="0" y="0"/>
-          <a:ext cx="0" cy="0"/>
-          <a:chOff x="0" y="0"/>
-          <a:chExt cx="0" cy="0"/>
-        </a:xfrm>
-      </p:grpSpPr>
-      <p:sp>
-        <p:nvSpPr>
-          <p:cNvPr id="2" name="Title 1">
-            <a:extLst>
-              <a:ext uri="{FF2B5EF4-FFF2-40B4-BE49-F238E27FC236}">
-                <a16:creationId xmlns:a16="http://schemas.microsoft.com/office/drawing/2014/main" id="{040A2045-7085-4E76-FFFE-B687F1D889F9}"/>
-              </a:ext>
-            </a:extLst>
-          </p:cNvPr>
-          <p:cNvSpPr>
-            <a:spLocks noGrp="1"/>
-          </p:cNvSpPr>
-          <p:nvPr>
-            <p:ph type="title"/>
-          </p:nvPr>
-        </p:nvSpPr>
-        <p:spPr/>
-        <p:txBody>
-          <a:bodyPr/>
-          <a:lstStyle/>
-          <a:p>
-            <a:endParaRPr lang="en-US"/>
-          </a:p>
-        </p:txBody>
-      </p:sp>
-      <p:sp>
-        <p:nvSpPr>
-          <p:cNvPr id="3" name="Content Placeholder 2">
-            <a:extLst>
-              <a:ext uri="{FF2B5EF4-FFF2-40B4-BE49-F238E27FC236}">
-                <a16:creationId xmlns:a16="http://schemas.microsoft.com/office/drawing/2014/main" id="{01BB21DA-7CEC-02E8-B547-D0DA06D17669}"/>
-              </a:ext>
-            </a:extLst>
-          </p:cNvPr>
-          <p:cNvSpPr>
-            <a:spLocks noGrp="1"/>
-          </p:cNvSpPr>
-          <p:nvPr>
-            <p:ph idx="1"/>
-          </p:nvPr>
-        </p:nvSpPr>
-        <p:spPr/>
-        <p:txBody>
-          <a:bodyPr/>
-          <a:lstStyle/>
-          <a:p>
-            <a:endParaRPr lang="en-US"/>
-          </a:p>
-        </p:txBody>
-      </p:sp>
-    </p:spTree>
-    <p:extLst>
-      <p:ext uri="{BB962C8B-B14F-4D97-AF65-F5344CB8AC3E}">
-        <p14:creationId xmlns:p14="http://schemas.microsoft.com/office/powerpoint/2010/main" val="979290212"/>
       </p:ext>
     </p:extLst>
   </p:cSld>

--- a/slides/chapter_4.pptx
+++ b/slides/chapter_4.pptx
@@ -3754,22 +3754,46 @@
             </a:r>
           </a:p>
           <a:p>
+            <a:pPr lvl="2"/>
+            <a:r>
+              <a:rPr lang="en-US" dirty="0"/>
+              <a:t>Map types</a:t>
+            </a:r>
+          </a:p>
+          <a:p>
+            <a:pPr lvl="2"/>
+            <a:r>
+              <a:rPr lang="en-US" dirty="0"/>
+              <a:t>Data type review and grouping/aggregation review. </a:t>
+            </a:r>
+          </a:p>
+          <a:p>
             <a:pPr lvl="1"/>
             <a:r>
               <a:rPr lang="en-US" dirty="0"/>
-              <a:t>Intro to </a:t>
-            </a:r>
-            <a:r>
-              <a:rPr lang="en-US"/>
-              <a:t>Maps exercise (Intro to maps zip file in repository). </a:t>
-            </a:r>
-            <a:endParaRPr lang="en-US" dirty="0"/>
+              <a:t>Intro to Maps exercise (Intro to maps zip file in repository). </a:t>
+            </a:r>
+          </a:p>
+          <a:p>
+            <a:pPr lvl="2"/>
+            <a:r>
+              <a:rPr lang="en-US" dirty="0"/>
+              <a:t>If anyone wants to try to make an account at </a:t>
+            </a:r>
+            <a:r>
+              <a:rPr lang="en-US" dirty="0" err="1"/>
+              <a:t>mapbox.com</a:t>
+            </a:r>
+            <a:r>
+              <a:rPr lang="en-US" dirty="0"/>
+              <a:t> and see if it is still possible to make a free account, that’d be amazing and your classmates will love you forever. </a:t>
+            </a:r>
           </a:p>
           <a:p>
             <a:pPr lvl="1"/>
             <a:r>
               <a:rPr lang="en-US" dirty="0"/>
-              <a:t>Try to use H&amp;M dataset to display something. </a:t>
+              <a:t>Try to use H&amp;M dataset to display something. (Might use for data cleanup example soon). </a:t>
             </a:r>
           </a:p>
           <a:p>
